--- a/erc-presentation/erc_30min_bw.pptx
+++ b/erc-presentation/erc_30min_bw.pptx
@@ -1716,7 +1716,7 @@
           <a:lstStyle/>
           <a:p>
             <a:r>
-              <a:t>2자산 ERC의 닫힌 해가 의미하는 것을 설명하겠습니다. 삼성전자(σ=30%)와 미국 국채(σ=7%)로 ERC를 만들면, 삼성전자 19%, 국채 81%입니다. 놀라운 것은 이 비중이 상관계수에 무관하다는 것입니다. 상관이 −0.5이든 +0.5이든 항상 19:81입니다. MV는 상관에 따라 62.5%에서 85.7%까지 크게 변합니다.</a:t>
+              <a:t>2자산 ERC의 닫힌 해가 의미하는 것을 설명하겠습니다. 삼성전자(σ=30%)와 미국 국채(σ=7%)로 ERC를 만들면, 삼성전자 19%, 국채 81%입니다. 놀라운 것은 이 비중이 상관계수에 무관하다는 것입니다.</a:t>
             </a:r>
           </a:p>
         </p:txBody>
@@ -5874,9 +5874,33 @@
           </a:p>
         </p:txBody>
       </p:sp>
-      <p:sp>
-        <p:nvSpPr>
-          <p:cNvPr id="16" name="TextBox 15"/>
+      <p:pic>
+        <p:nvPicPr>
+          <p:cNvPr id="16" name="Picture 15" descr="chart_4asset.png"/>
+          <p:cNvPicPr>
+            <a:picLocks noChangeAspect="1"/>
+          </p:cNvPicPr>
+          <p:nvPr/>
+        </p:nvPicPr>
+        <p:blipFill>
+          <a:blip r:embed="rId2"/>
+          <a:stretch>
+            <a:fillRect/>
+          </a:stretch>
+        </p:blipFill>
+        <p:spPr>
+          <a:xfrm>
+            <a:off x="548640" y="5303520"/>
+            <a:ext cx="10972800" cy="1371600"/>
+          </a:xfrm>
+          <a:prstGeom prst="rect">
+            <a:avLst/>
+          </a:prstGeom>
+        </p:spPr>
+      </p:pic>
+      <p:sp>
+        <p:nvSpPr>
+          <p:cNvPr id="17" name="TextBox 16"/>
           <p:cNvSpPr txBox="1"/>
           <p:nvPr/>
         </p:nvSpPr>
@@ -9394,9 +9418,33 @@
           </a:p>
         </p:txBody>
       </p:sp>
-      <p:sp>
-        <p:nvSpPr>
-          <p:cNvPr id="18" name="TextBox 17"/>
+      <p:pic>
+        <p:nvPicPr>
+          <p:cNvPr id="18" name="Picture 17" descr="chart_corr.png"/>
+          <p:cNvPicPr>
+            <a:picLocks noChangeAspect="1"/>
+          </p:cNvPicPr>
+          <p:nvPr/>
+        </p:nvPicPr>
+        <p:blipFill>
+          <a:blip r:embed="rId2"/>
+          <a:stretch>
+            <a:fillRect/>
+          </a:stretch>
+        </p:blipFill>
+        <p:spPr>
+          <a:xfrm>
+            <a:off x="365760" y="4572000"/>
+            <a:ext cx="5486400" cy="2103120"/>
+          </a:xfrm>
+          <a:prstGeom prst="rect">
+            <a:avLst/>
+          </a:prstGeom>
+        </p:spPr>
+      </p:pic>
+      <p:sp>
+        <p:nvSpPr>
+          <p:cNvPr id="19" name="TextBox 18"/>
           <p:cNvSpPr txBox="1"/>
           <p:nvPr/>
         </p:nvSpPr>
@@ -10346,7 +10394,7 @@
         <p:spPr>
           <a:xfrm>
             <a:off x="6217920" y="1005840"/>
-            <a:ext cx="5303520" cy="5029200"/>
+            <a:ext cx="5303520" cy="2286000"/>
           </a:xfrm>
           <a:prstGeom prst="rect">
             <a:avLst/>
@@ -10695,9 +10743,57 @@
           </a:p>
         </p:txBody>
       </p:sp>
-      <p:sp>
-        <p:nvSpPr>
-          <p:cNvPr id="8" name="TextBox 7"/>
+      <p:pic>
+        <p:nvPicPr>
+          <p:cNvPr id="8" name="Picture 7" descr="chart_box_weights.png"/>
+          <p:cNvPicPr>
+            <a:picLocks noChangeAspect="1"/>
+          </p:cNvPicPr>
+          <p:nvPr/>
+        </p:nvPicPr>
+        <p:blipFill>
+          <a:blip r:embed="rId4"/>
+          <a:stretch>
+            <a:fillRect/>
+          </a:stretch>
+        </p:blipFill>
+        <p:spPr>
+          <a:xfrm>
+            <a:off x="6217920" y="3474720"/>
+            <a:ext cx="5303520" cy="1463040"/>
+          </a:xfrm>
+          <a:prstGeom prst="rect">
+            <a:avLst/>
+          </a:prstGeom>
+        </p:spPr>
+      </p:pic>
+      <p:pic>
+        <p:nvPicPr>
+          <p:cNvPr id="9" name="Picture 8" descr="chart_box_rc.png"/>
+          <p:cNvPicPr>
+            <a:picLocks noChangeAspect="1"/>
+          </p:cNvPicPr>
+          <p:nvPr/>
+        </p:nvPicPr>
+        <p:blipFill>
+          <a:blip r:embed="rId5"/>
+          <a:stretch>
+            <a:fillRect/>
+          </a:stretch>
+        </p:blipFill>
+        <p:spPr>
+          <a:xfrm>
+            <a:off x="6217920" y="5029200"/>
+            <a:ext cx="5303520" cy="1463040"/>
+          </a:xfrm>
+          <a:prstGeom prst="rect">
+            <a:avLst/>
+          </a:prstGeom>
+        </p:spPr>
+      </p:pic>
+      <p:sp>
+        <p:nvSpPr>
+          <p:cNvPr id="10" name="TextBox 9"/>
           <p:cNvSpPr txBox="1"/>
           <p:nvPr/>
         </p:nvSpPr>
@@ -11698,9 +11794,33 @@
           </a:prstGeom>
         </p:spPr>
       </p:pic>
-      <p:sp>
-        <p:nvSpPr>
-          <p:cNvPr id="6" name="Rectangle 5"/>
+      <p:pic>
+        <p:nvPicPr>
+          <p:cNvPr id="6" name="Picture 5" descr="chart_cumret.png"/>
+          <p:cNvPicPr>
+            <a:picLocks noChangeAspect="1"/>
+          </p:cNvPicPr>
+          <p:nvPr/>
+        </p:nvPicPr>
+        <p:blipFill>
+          <a:blip r:embed="rId3"/>
+          <a:stretch>
+            <a:fillRect/>
+          </a:stretch>
+        </p:blipFill>
+        <p:spPr>
+          <a:xfrm>
+            <a:off x="365760" y="4389120"/>
+            <a:ext cx="5669280" cy="2286000"/>
+          </a:xfrm>
+          <a:prstGeom prst="rect">
+            <a:avLst/>
+          </a:prstGeom>
+        </p:spPr>
+      </p:pic>
+      <p:sp>
+        <p:nvSpPr>
+          <p:cNvPr id="7" name="Rectangle 6"/>
           <p:cNvSpPr/>
           <p:nvPr/>
         </p:nvSpPr>
@@ -11746,7 +11866,7 @@
       </p:sp>
       <p:sp>
         <p:nvSpPr>
-          <p:cNvPr id="7" name="TextBox 6"/>
+          <p:cNvPr id="8" name="TextBox 7"/>
           <p:cNvSpPr txBox="1"/>
           <p:nvPr/>
         </p:nvSpPr>
@@ -11981,7 +12101,7 @@
       </p:sp>
       <p:sp>
         <p:nvSpPr>
-          <p:cNvPr id="8" name="Rectangle 7"/>
+          <p:cNvPr id="9" name="Rectangle 8"/>
           <p:cNvSpPr/>
           <p:nvPr/>
         </p:nvSpPr>
@@ -12027,7 +12147,7 @@
       </p:sp>
       <p:sp>
         <p:nvSpPr>
-          <p:cNvPr id="9" name="TextBox 8"/>
+          <p:cNvPr id="10" name="TextBox 9"/>
           <p:cNvSpPr txBox="1"/>
           <p:nvPr/>
         </p:nvSpPr>
@@ -12143,7 +12263,7 @@
       </p:sp>
       <p:sp>
         <p:nvSpPr>
-          <p:cNvPr id="10" name="TextBox 9"/>
+          <p:cNvPr id="11" name="TextBox 10"/>
           <p:cNvSpPr txBox="1"/>
           <p:nvPr/>
         </p:nvSpPr>
@@ -13434,9 +13554,57 @@
           </a:p>
         </p:txBody>
       </p:sp>
-      <p:sp>
-        <p:nvSpPr>
-          <p:cNvPr id="8" name="TextBox 7"/>
+      <p:pic>
+        <p:nvPicPr>
+          <p:cNvPr id="8" name="Picture 7" descr="chart_weight_ts.png"/>
+          <p:cNvPicPr>
+            <a:picLocks noChangeAspect="1"/>
+          </p:cNvPicPr>
+          <p:nvPr/>
+        </p:nvPicPr>
+        <p:blipFill>
+          <a:blip r:embed="rId3"/>
+          <a:stretch>
+            <a:fillRect/>
+          </a:stretch>
+        </p:blipFill>
+        <p:spPr>
+          <a:xfrm>
+            <a:off x="548640" y="1005840"/>
+            <a:ext cx="5486400" cy="2743200"/>
+          </a:xfrm>
+          <a:prstGeom prst="rect">
+            <a:avLst/>
+          </a:prstGeom>
+        </p:spPr>
+      </p:pic>
+      <p:pic>
+        <p:nvPicPr>
+          <p:cNvPr id="9" name="Picture 8" descr="chart_rc_ts.png"/>
+          <p:cNvPicPr>
+            <a:picLocks noChangeAspect="1"/>
+          </p:cNvPicPr>
+          <p:nvPr/>
+        </p:nvPicPr>
+        <p:blipFill>
+          <a:blip r:embed="rId4"/>
+          <a:stretch>
+            <a:fillRect/>
+          </a:stretch>
+        </p:blipFill>
+        <p:spPr>
+          <a:xfrm>
+            <a:off x="6217920" y="1005840"/>
+            <a:ext cx="5486400" cy="2743200"/>
+          </a:xfrm>
+          <a:prstGeom prst="rect">
+            <a:avLst/>
+          </a:prstGeom>
+        </p:spPr>
+      </p:pic>
+      <p:sp>
+        <p:nvSpPr>
+          <p:cNvPr id="10" name="TextBox 9"/>
           <p:cNvSpPr txBox="1"/>
           <p:nvPr/>
         </p:nvSpPr>
@@ -17553,12 +17721,20 @@
           </a:p>
         </p:txBody>
       </p:sp>
-      <p:sp>
-        <p:nvSpPr>
-          <p:cNvPr id="9" name="Rectangle 8"/>
-          <p:cNvSpPr/>
-          <p:nvPr/>
-        </p:nvSpPr>
+      <p:pic>
+        <p:nvPicPr>
+          <p:cNvPr id="9" name="Picture 8" descr="chart_2asset.png"/>
+          <p:cNvPicPr>
+            <a:picLocks noChangeAspect="1"/>
+          </p:cNvPicPr>
+          <p:nvPr/>
+        </p:nvPicPr>
+        <p:blipFill>
+          <a:blip r:embed="rId2"/>
+          <a:stretch>
+            <a:fillRect/>
+          </a:stretch>
+        </p:blipFill>
         <p:spPr>
           <a:xfrm>
             <a:off x="6217920" y="1828800"/>
@@ -17567,292 +17743,11 @@
           <a:prstGeom prst="rect">
             <a:avLst/>
           </a:prstGeom>
-          <a:solidFill>
-            <a:srgbClr val="F5F5F5"/>
-          </a:solidFill>
-          <a:ln w="9525">
-            <a:solidFill>
-              <a:srgbClr val="E8E8E8"/>
-            </a:solidFill>
-          </a:ln>
-          <a:effectLst/>
-        </p:spPr>
-        <p:style>
-          <a:lnRef idx="1">
-            <a:schemeClr val="accent1"/>
-          </a:lnRef>
-          <a:fillRef idx="3">
-            <a:schemeClr val="accent1"/>
-          </a:fillRef>
-          <a:effectRef idx="2">
-            <a:schemeClr val="accent1"/>
-          </a:effectRef>
-          <a:fontRef idx="minor">
-            <a:schemeClr val="lt1"/>
-          </a:fontRef>
-        </p:style>
-        <p:txBody>
-          <a:bodyPr rtlCol="0" anchor="ctr"/>
-          <a:lstStyle/>
-          <a:p>
-            <a:pPr algn="ctr"/>
-          </a:p>
-        </p:txBody>
-      </p:sp>
+        </p:spPr>
+      </p:pic>
       <p:sp>
         <p:nvSpPr>
           <p:cNvPr id="10" name="TextBox 9"/>
-          <p:cNvSpPr txBox="1"/>
-          <p:nvPr/>
-        </p:nvSpPr>
-        <p:spPr>
-          <a:xfrm>
-            <a:off x="6400800" y="1920240"/>
-            <a:ext cx="4937760" cy="4389120"/>
-          </a:xfrm>
-          <a:prstGeom prst="rect">
-            <a:avLst/>
-          </a:prstGeom>
-          <a:noFill/>
-        </p:spPr>
-        <p:txBody>
-          <a:bodyPr wrap="square">
-            <a:spAutoFit/>
-          </a:bodyPr>
-          <a:lstStyle/>
-          <a:p>
-            <a:pPr>
-              <a:spcAft>
-                <a:spcPts val="200"/>
-              </a:spcAft>
-              <a:defRPr sz="1100">
-                <a:solidFill>
-                  <a:srgbClr val="333333"/>
-                </a:solidFill>
-                <a:latin typeface="Pretendard"/>
-              </a:defRPr>
-            </a:pPr>
-            <a:r>
-              <a:t>왜 상관이 소거되는가? (직관)</a:t>
-            </a:r>
-          </a:p>
-          <a:p>
-            <a:pPr>
-              <a:spcAft>
-                <a:spcPts val="200"/>
-              </a:spcAft>
-              <a:defRPr sz="1100">
-                <a:solidFill>
-                  <a:srgbClr val="333333"/>
-                </a:solidFill>
-                <a:latin typeface="Pretendard"/>
-              </a:defRPr>
-            </a:pPr>
-          </a:p>
-          <a:p>
-            <a:pPr>
-              <a:spcAft>
-                <a:spcPts val="200"/>
-              </a:spcAft>
-              <a:defRPr sz="1100">
-                <a:solidFill>
-                  <a:srgbClr val="333333"/>
-                </a:solidFill>
-                <a:latin typeface="Pretendard"/>
-              </a:defRPr>
-            </a:pPr>
-            <a:r>
-              <a:t>ERC 조건: 두 자산의 리스크 기여도가 같다</a:t>
-            </a:r>
-          </a:p>
-          <a:p>
-            <a:pPr>
-              <a:spcAft>
-                <a:spcPts val="200"/>
-              </a:spcAft>
-              <a:defRPr sz="1100">
-                <a:solidFill>
-                  <a:srgbClr val="333333"/>
-                </a:solidFill>
-                <a:latin typeface="Pretendard"/>
-              </a:defRPr>
-            </a:pPr>
-            <a:r>
-              <a:t>리스크 기여도 ∝ 비중 × 변동성 × 포트폴리오와의 상관</a:t>
-            </a:r>
-          </a:p>
-          <a:p>
-            <a:pPr>
-              <a:spcAft>
-                <a:spcPts val="200"/>
-              </a:spcAft>
-              <a:defRPr sz="1100">
-                <a:solidFill>
-                  <a:srgbClr val="333333"/>
-                </a:solidFill>
-                <a:latin typeface="Pretendard"/>
-              </a:defRPr>
-            </a:pPr>
-          </a:p>
-          <a:p>
-            <a:pPr>
-              <a:spcAft>
-                <a:spcPts val="200"/>
-              </a:spcAft>
-              <a:defRPr sz="1100">
-                <a:solidFill>
-                  <a:srgbClr val="333333"/>
-                </a:solidFill>
-                <a:latin typeface="Pretendard"/>
-              </a:defRPr>
-            </a:pPr>
-            <a:r>
-              <a:t>2자산에서 두 자산 모두 같은 포트폴리오에 속하므로</a:t>
-            </a:r>
-          </a:p>
-          <a:p>
-            <a:pPr>
-              <a:spcAft>
-                <a:spcPts val="200"/>
-              </a:spcAft>
-              <a:defRPr sz="1100">
-                <a:solidFill>
-                  <a:srgbClr val="333333"/>
-                </a:solidFill>
-                <a:latin typeface="Pretendard"/>
-              </a:defRPr>
-            </a:pPr>
-            <a:r>
-              <a:t>상관 부분이 양쪽에서 동일하게 나타나 소거됨</a:t>
-            </a:r>
-          </a:p>
-          <a:p>
-            <a:pPr>
-              <a:spcAft>
-                <a:spcPts val="200"/>
-              </a:spcAft>
-              <a:defRPr sz="1100">
-                <a:solidFill>
-                  <a:srgbClr val="333333"/>
-                </a:solidFill>
-                <a:latin typeface="Pretendard"/>
-              </a:defRPr>
-            </a:pPr>
-          </a:p>
-          <a:p>
-            <a:pPr>
-              <a:spcAft>
-                <a:spcPts val="200"/>
-              </a:spcAft>
-              <a:defRPr sz="1100">
-                <a:solidFill>
-                  <a:srgbClr val="333333"/>
-                </a:solidFill>
-                <a:latin typeface="Pretendard"/>
-              </a:defRPr>
-            </a:pPr>
-            <a:r>
-              <a:t>결국 xᵢσᵢ = xⱼσⱼ</a:t>
-            </a:r>
-          </a:p>
-          <a:p>
-            <a:pPr>
-              <a:spcAft>
-                <a:spcPts val="200"/>
-              </a:spcAft>
-              <a:defRPr sz="1100">
-                <a:solidFill>
-                  <a:srgbClr val="333333"/>
-                </a:solidFill>
-                <a:latin typeface="Pretendard"/>
-              </a:defRPr>
-            </a:pPr>
-            <a:r>
-              <a:t>→ "비중 × 변동성"이 같으면 됨</a:t>
-            </a:r>
-          </a:p>
-          <a:p>
-            <a:pPr>
-              <a:spcAft>
-                <a:spcPts val="200"/>
-              </a:spcAft>
-              <a:defRPr sz="1100">
-                <a:solidFill>
-                  <a:srgbClr val="333333"/>
-                </a:solidFill>
-                <a:latin typeface="Pretendard"/>
-              </a:defRPr>
-            </a:pPr>
-            <a:r>
-              <a:t>→ 변동성이 큰 자산은 비중을 줄여서 맞춤</a:t>
-            </a:r>
-          </a:p>
-          <a:p>
-            <a:pPr>
-              <a:spcAft>
-                <a:spcPts val="200"/>
-              </a:spcAft>
-              <a:defRPr sz="1100">
-                <a:solidFill>
-                  <a:srgbClr val="333333"/>
-                </a:solidFill>
-                <a:latin typeface="Pretendard"/>
-              </a:defRPr>
-            </a:pPr>
-          </a:p>
-          <a:p>
-            <a:pPr>
-              <a:spcAft>
-                <a:spcPts val="200"/>
-              </a:spcAft>
-              <a:defRPr sz="1100">
-                <a:solidFill>
-                  <a:srgbClr val="333333"/>
-                </a:solidFill>
-                <a:latin typeface="Pretendard"/>
-              </a:defRPr>
-            </a:pPr>
-            <a:r>
-              <a:t>3자산 이상에서는 각 자산과 포트폴리오의 상관이</a:t>
-            </a:r>
-          </a:p>
-          <a:p>
-            <a:pPr>
-              <a:spcAft>
-                <a:spcPts val="200"/>
-              </a:spcAft>
-              <a:defRPr sz="1100">
-                <a:solidFill>
-                  <a:srgbClr val="333333"/>
-                </a:solidFill>
-                <a:latin typeface="Pretendard"/>
-              </a:defRPr>
-            </a:pPr>
-            <a:r>
-              <a:t>다르므로 소거되지 않음</a:t>
-            </a:r>
-          </a:p>
-          <a:p>
-            <a:pPr>
-              <a:spcAft>
-                <a:spcPts val="200"/>
-              </a:spcAft>
-              <a:defRPr sz="1100">
-                <a:solidFill>
-                  <a:srgbClr val="333333"/>
-                </a:solidFill>
-                <a:latin typeface="Pretendard"/>
-              </a:defRPr>
-            </a:pPr>
-            <a:r>
-              <a:t>→ 하지만 ERC가 상관 추정 오류에 상대적으로 강건</a:t>
-            </a:r>
-          </a:p>
-        </p:txBody>
-      </p:sp>
-      <p:sp>
-        <p:nvSpPr>
-          <p:cNvPr id="11" name="TextBox 10"/>
           <p:cNvSpPr txBox="1"/>
           <p:nvPr/>
         </p:nvSpPr>

--- a/erc-presentation/erc_30min_bw.pptx
+++ b/erc-presentation/erc_30min_bw.pptx
@@ -5876,7 +5876,7 @@
       </p:sp>
       <p:pic>
         <p:nvPicPr>
-          <p:cNvPr id="16" name="Picture 15" descr="chart_4asset.png"/>
+          <p:cNvPr id="16" name="Picture 15" descr="driven_4asset_weights.png"/>
           <p:cNvPicPr>
             <a:picLocks noChangeAspect="1"/>
           </p:cNvPicPr>
@@ -5891,16 +5891,40 @@
         <p:spPr>
           <a:xfrm>
             <a:off x="548640" y="5303520"/>
-            <a:ext cx="10972800" cy="1371600"/>
+            <a:ext cx="5486400" cy="1371600"/>
           </a:xfrm>
           <a:prstGeom prst="rect">
             <a:avLst/>
           </a:prstGeom>
         </p:spPr>
       </p:pic>
-      <p:sp>
-        <p:nvSpPr>
-          <p:cNvPr id="17" name="TextBox 16"/>
+      <p:pic>
+        <p:nvPicPr>
+          <p:cNvPr id="17" name="Picture 16" descr="driven_4asset_rc.png"/>
+          <p:cNvPicPr>
+            <a:picLocks noChangeAspect="1"/>
+          </p:cNvPicPr>
+          <p:nvPr/>
+        </p:nvPicPr>
+        <p:blipFill>
+          <a:blip r:embed="rId3"/>
+          <a:stretch>
+            <a:fillRect/>
+          </a:stretch>
+        </p:blipFill>
+        <p:spPr>
+          <a:xfrm>
+            <a:off x="6217920" y="5303520"/>
+            <a:ext cx="5486400" cy="1371600"/>
+          </a:xfrm>
+          <a:prstGeom prst="rect">
+            <a:avLst/>
+          </a:prstGeom>
+        </p:spPr>
+      </p:pic>
+      <p:sp>
+        <p:nvSpPr>
+          <p:cNvPr id="18" name="TextBox 17"/>
           <p:cNvSpPr txBox="1"/>
           <p:nvPr/>
         </p:nvSpPr>
@@ -10745,7 +10769,7 @@
       </p:sp>
       <p:pic>
         <p:nvPicPr>
-          <p:cNvPr id="8" name="Picture 7" descr="chart_box_weights.png"/>
+          <p:cNvPr id="8" name="Picture 7" descr="driven_box_w_erc.png"/>
           <p:cNvPicPr>
             <a:picLocks noChangeAspect="1"/>
           </p:cNvPicPr>
@@ -10769,7 +10793,7 @@
       </p:pic>
       <p:pic>
         <p:nvPicPr>
-          <p:cNvPr id="9" name="Picture 8" descr="chart_box_rc.png"/>
+          <p:cNvPr id="9" name="Picture 8" descr="driven_box_rc_erc.png"/>
           <p:cNvPicPr>
             <a:picLocks noChangeAspect="1"/>
           </p:cNvPicPr>
@@ -10791,9 +10815,153 @@
           </a:prstGeom>
         </p:spPr>
       </p:pic>
-      <p:sp>
-        <p:nvSpPr>
-          <p:cNvPr id="10" name="TextBox 9"/>
+      <p:pic>
+        <p:nvPicPr>
+          <p:cNvPr id="10" name="Picture 9" descr="driven_box_w_ew.png"/>
+          <p:cNvPicPr>
+            <a:picLocks noChangeAspect="1"/>
+          </p:cNvPicPr>
+          <p:nvPr/>
+        </p:nvPicPr>
+        <p:blipFill>
+          <a:blip r:embed="rId6"/>
+          <a:stretch>
+            <a:fillRect/>
+          </a:stretch>
+        </p:blipFill>
+        <p:spPr>
+          <a:xfrm>
+            <a:off x="6217920" y="3474720"/>
+            <a:ext cx="1737360" cy="1371600"/>
+          </a:xfrm>
+          <a:prstGeom prst="rect">
+            <a:avLst/>
+          </a:prstGeom>
+        </p:spPr>
+      </p:pic>
+      <p:pic>
+        <p:nvPicPr>
+          <p:cNvPr id="11" name="Picture 10" descr="driven_box_w_mv.png"/>
+          <p:cNvPicPr>
+            <a:picLocks noChangeAspect="1"/>
+          </p:cNvPicPr>
+          <p:nvPr/>
+        </p:nvPicPr>
+        <p:blipFill>
+          <a:blip r:embed="rId7"/>
+          <a:stretch>
+            <a:fillRect/>
+          </a:stretch>
+        </p:blipFill>
+        <p:spPr>
+          <a:xfrm>
+            <a:off x="7955279" y="3474720"/>
+            <a:ext cx="1737360" cy="1371600"/>
+          </a:xfrm>
+          <a:prstGeom prst="rect">
+            <a:avLst/>
+          </a:prstGeom>
+        </p:spPr>
+      </p:pic>
+      <p:pic>
+        <p:nvPicPr>
+          <p:cNvPr id="12" name="Picture 11" descr="driven_box_w_erc.png"/>
+          <p:cNvPicPr>
+            <a:picLocks noChangeAspect="1"/>
+          </p:cNvPicPr>
+          <p:nvPr/>
+        </p:nvPicPr>
+        <p:blipFill>
+          <a:blip r:embed="rId4"/>
+          <a:stretch>
+            <a:fillRect/>
+          </a:stretch>
+        </p:blipFill>
+        <p:spPr>
+          <a:xfrm>
+            <a:off x="9692640" y="3474720"/>
+            <a:ext cx="1737360" cy="1371600"/>
+          </a:xfrm>
+          <a:prstGeom prst="rect">
+            <a:avLst/>
+          </a:prstGeom>
+        </p:spPr>
+      </p:pic>
+      <p:pic>
+        <p:nvPicPr>
+          <p:cNvPr id="13" name="Picture 12" descr="driven_box_rc_ew.png"/>
+          <p:cNvPicPr>
+            <a:picLocks noChangeAspect="1"/>
+          </p:cNvPicPr>
+          <p:nvPr/>
+        </p:nvPicPr>
+        <p:blipFill>
+          <a:blip r:embed="rId8"/>
+          <a:stretch>
+            <a:fillRect/>
+          </a:stretch>
+        </p:blipFill>
+        <p:spPr>
+          <a:xfrm>
+            <a:off x="6217920" y="4937760"/>
+            <a:ext cx="1737360" cy="1371600"/>
+          </a:xfrm>
+          <a:prstGeom prst="rect">
+            <a:avLst/>
+          </a:prstGeom>
+        </p:spPr>
+      </p:pic>
+      <p:pic>
+        <p:nvPicPr>
+          <p:cNvPr id="14" name="Picture 13" descr="driven_box_rc_mv.png"/>
+          <p:cNvPicPr>
+            <a:picLocks noChangeAspect="1"/>
+          </p:cNvPicPr>
+          <p:nvPr/>
+        </p:nvPicPr>
+        <p:blipFill>
+          <a:blip r:embed="rId9"/>
+          <a:stretch>
+            <a:fillRect/>
+          </a:stretch>
+        </p:blipFill>
+        <p:spPr>
+          <a:xfrm>
+            <a:off x="7955279" y="4937760"/>
+            <a:ext cx="1737360" cy="1371600"/>
+          </a:xfrm>
+          <a:prstGeom prst="rect">
+            <a:avLst/>
+          </a:prstGeom>
+        </p:spPr>
+      </p:pic>
+      <p:pic>
+        <p:nvPicPr>
+          <p:cNvPr id="15" name="Picture 14" descr="driven_box_rc_erc.png"/>
+          <p:cNvPicPr>
+            <a:picLocks noChangeAspect="1"/>
+          </p:cNvPicPr>
+          <p:nvPr/>
+        </p:nvPicPr>
+        <p:blipFill>
+          <a:blip r:embed="rId5"/>
+          <a:stretch>
+            <a:fillRect/>
+          </a:stretch>
+        </p:blipFill>
+        <p:spPr>
+          <a:xfrm>
+            <a:off x="9692640" y="4937760"/>
+            <a:ext cx="1737360" cy="1371600"/>
+          </a:xfrm>
+          <a:prstGeom prst="rect">
+            <a:avLst/>
+          </a:prstGeom>
+        </p:spPr>
+      </p:pic>
+      <p:sp>
+        <p:nvSpPr>
+          <p:cNvPr id="16" name="TextBox 15"/>
           <p:cNvSpPr txBox="1"/>
           <p:nvPr/>
         </p:nvSpPr>
@@ -11796,7 +11964,7 @@
       </p:pic>
       <p:pic>
         <p:nvPicPr>
-          <p:cNvPr id="6" name="Picture 5" descr="chart_cumret.png"/>
+          <p:cNvPr id="6" name="Picture 5" descr="driven_cumret.png"/>
           <p:cNvPicPr>
             <a:picLocks noChangeAspect="1"/>
           </p:cNvPicPr>
@@ -13556,7 +13724,7 @@
       </p:sp>
       <p:pic>
         <p:nvPicPr>
-          <p:cNvPr id="8" name="Picture 7" descr="chart_weight_ts.png"/>
+          <p:cNvPr id="8" name="Picture 7" descr="driven_weight_ts.png"/>
           <p:cNvPicPr>
             <a:picLocks noChangeAspect="1"/>
           </p:cNvPicPr>
@@ -13580,7 +13748,7 @@
       </p:pic>
       <p:pic>
         <p:nvPicPr>
-          <p:cNvPr id="9" name="Picture 8" descr="chart_rc_ts.png"/>
+          <p:cNvPr id="9" name="Picture 8" descr="driven_rc_ts.png"/>
           <p:cNvPicPr>
             <a:picLocks noChangeAspect="1"/>
           </p:cNvPicPr>
@@ -15352,9 +15520,33 @@
           </a:p>
         </p:txBody>
       </p:sp>
-      <p:sp>
-        <p:nvSpPr>
-          <p:cNvPr id="5" name="TextBox 4"/>
+      <p:pic>
+        <p:nvPicPr>
+          <p:cNvPr id="5" name="Picture 4" descr="driven_radar.png"/>
+          <p:cNvPicPr>
+            <a:picLocks noChangeAspect="1"/>
+          </p:cNvPicPr>
+          <p:nvPr/>
+        </p:nvPicPr>
+        <p:blipFill>
+          <a:blip r:embed="rId2"/>
+          <a:stretch>
+            <a:fillRect/>
+          </a:stretch>
+        </p:blipFill>
+        <p:spPr>
+          <a:xfrm>
+            <a:off x="7772400" y="1371600"/>
+            <a:ext cx="4114800" cy="4114800"/>
+          </a:xfrm>
+          <a:prstGeom prst="rect">
+            <a:avLst/>
+          </a:prstGeom>
+        </p:spPr>
+      </p:pic>
+      <p:sp>
+        <p:nvSpPr>
+          <p:cNvPr id="6" name="TextBox 5"/>
           <p:cNvSpPr txBox="1"/>
           <p:nvPr/>
         </p:nvSpPr>
@@ -17723,7 +17915,7 @@
       </p:sp>
       <p:pic>
         <p:nvPicPr>
-          <p:cNvPr id="9" name="Picture 8" descr="chart_2asset.png"/>
+          <p:cNvPr id="9" name="Picture 8" descr="driven_2asset.png"/>
           <p:cNvPicPr>
             <a:picLocks noChangeAspect="1"/>
           </p:cNvPicPr>
